--- a/report/15.6. Di động - final.pptx
+++ b/report/15.6. Di động - final.pptx
@@ -5,10 +5,10 @@
     <p:sldMasterId id="2147483648" r:id="rId1"/>
   </p:sldMasterIdLst>
   <p:notesMasterIdLst>
-    <p:notesMasterId r:id="rId17"/>
+    <p:notesMasterId r:id="rId18"/>
   </p:notesMasterIdLst>
   <p:handoutMasterIdLst>
-    <p:handoutMasterId r:id="rId18"/>
+    <p:handoutMasterId r:id="rId19"/>
   </p:handoutMasterIdLst>
   <p:sldIdLst>
     <p:sldId id="276" r:id="rId2"/>
@@ -25,7 +25,8 @@
     <p:sldId id="315" r:id="rId13"/>
     <p:sldId id="304" r:id="rId14"/>
     <p:sldId id="305" r:id="rId15"/>
-    <p:sldId id="275" r:id="rId16"/>
+    <p:sldId id="324" r:id="rId16"/>
+    <p:sldId id="275" r:id="rId17"/>
   </p:sldIdLst>
   <p:sldSz cx="12192000" cy="6858000"/>
   <p:notesSz cx="6858000" cy="9144000"/>
@@ -5143,6 +5144,143 @@
       </p:grpSpPr>
       <p:sp>
         <p:nvSpPr>
+          <p:cNvPr id="2" name="Title 1">
+            <a:extLst>
+              <a:ext uri="{FF2B5EF4-FFF2-40B4-BE49-F238E27FC236}">
+                <a16:creationId xmlns:a16="http://schemas.microsoft.com/office/drawing/2014/main" id="{8EB3062A-B583-4BF2-B6BF-0593EEBF68AF}"/>
+              </a:ext>
+            </a:extLst>
+          </p:cNvPr>
+          <p:cNvSpPr>
+            <a:spLocks noGrp="1"/>
+          </p:cNvSpPr>
+          <p:nvPr>
+            <p:ph type="title"/>
+          </p:nvPr>
+        </p:nvSpPr>
+        <p:spPr/>
+        <p:txBody>
+          <a:bodyPr/>
+          <a:lstStyle/>
+          <a:p>
+            <a:r>
+              <a:rPr lang="en-US"/>
+              <a:t>7. Phục lục</a:t>
+            </a:r>
+          </a:p>
+        </p:txBody>
+      </p:sp>
+      <p:sp>
+        <p:nvSpPr>
+          <p:cNvPr id="4" name="Content Placeholder 2">
+            <a:extLst>
+              <a:ext uri="{FF2B5EF4-FFF2-40B4-BE49-F238E27FC236}">
+                <a16:creationId xmlns:a16="http://schemas.microsoft.com/office/drawing/2014/main" id="{D557B234-06F4-4A2E-A203-55B084A2130B}"/>
+              </a:ext>
+            </a:extLst>
+          </p:cNvPr>
+          <p:cNvSpPr>
+            <a:spLocks noGrp="1"/>
+          </p:cNvSpPr>
+          <p:nvPr>
+            <p:ph idx="1"/>
+          </p:nvPr>
+        </p:nvSpPr>
+        <p:spPr>
+          <a:xfrm>
+            <a:off x="508000" y="1295400"/>
+            <a:ext cx="11074400" cy="4724400"/>
+          </a:xfrm>
+        </p:spPr>
+        <p:txBody>
+          <a:bodyPr/>
+          <a:lstStyle/>
+          <a:p>
+            <a:pPr>
+              <a:buFont typeface="Arial" panose="020B0604020202020204" pitchFamily="34" charset="0"/>
+              <a:buChar char="•"/>
+            </a:pPr>
+            <a:r>
+              <a:rPr lang="en-US" b="0" i="0">
+                <a:effectLst/>
+              </a:rPr>
+              <a:t>Github:giunzz/mobile_project</a:t>
+            </a:r>
+            <a:endParaRPr lang="en-US"/>
+          </a:p>
+          <a:p>
+            <a:pPr>
+              <a:buFont typeface="Arial" panose="020B0604020202020204" pitchFamily="34" charset="0"/>
+              <a:buChar char="•"/>
+            </a:pPr>
+            <a:r>
+              <a:rPr lang="en-US" b="0" i="0">
+                <a:effectLst/>
+              </a:rPr>
+              <a:t>File app: https://github.com/giunzz/mobile_project/tree/main/deployment</a:t>
+            </a:r>
+            <a:endParaRPr lang="en-US"/>
+          </a:p>
+          <a:p>
+            <a:pPr>
+              <a:buFont typeface="Arial" panose="020B0604020202020204" pitchFamily="34" charset="0"/>
+              <a:buChar char="•"/>
+            </a:pPr>
+            <a:r>
+              <a:rPr lang="en-US" b="0" i="0">
+                <a:effectLst/>
+              </a:rPr>
+              <a:t>Report theo tuần: https://github.com/giunzz/mobile_project/tree/main/report </a:t>
+            </a:r>
+            <a:endParaRPr lang="en-US"/>
+          </a:p>
+          <a:p>
+            <a:pPr>
+              <a:buFont typeface="Arial" panose="020B0604020202020204" pitchFamily="34" charset="0"/>
+              <a:buChar char="•"/>
+            </a:pPr>
+            <a:r>
+              <a:rPr lang="en-US" b="0" i="0">
+                <a:effectLst/>
+              </a:rPr>
+              <a:t>Phân công: https://docs.google.com/spreadsheets/d/1sClCX4doFPRGRslG_CvJLxAsMfU6heg3camePzlJto0/edit?gid=1815371347#gid=1815371347 </a:t>
+            </a:r>
+            <a:endParaRPr lang="en-US"/>
+          </a:p>
+        </p:txBody>
+      </p:sp>
+    </p:spTree>
+    <p:extLst>
+      <p:ext uri="{BB962C8B-B14F-4D97-AF65-F5344CB8AC3E}">
+        <p14:creationId xmlns:p14="http://schemas.microsoft.com/office/powerpoint/2010/main" val="737157135"/>
+      </p:ext>
+    </p:extLst>
+  </p:cSld>
+  <p:clrMapOvr>
+    <a:masterClrMapping/>
+  </p:clrMapOvr>
+</p:sld>
+</file>
+
+<file path=ppt/slides/slide16.xml><?xml version="1.0" encoding="utf-8"?>
+<p:sld xmlns:a="http://schemas.openxmlformats.org/drawingml/2006/main" xmlns:r="http://schemas.openxmlformats.org/officeDocument/2006/relationships" xmlns:p="http://schemas.openxmlformats.org/presentationml/2006/main">
+  <p:cSld>
+    <p:spTree>
+      <p:nvGrpSpPr>
+        <p:cNvPr id="1" name=""/>
+        <p:cNvGrpSpPr/>
+        <p:nvPr/>
+      </p:nvGrpSpPr>
+      <p:grpSpPr>
+        <a:xfrm>
+          <a:off x="0" y="0"/>
+          <a:ext cx="0" cy="0"/>
+          <a:chOff x="0" y="0"/>
+          <a:chExt cx="0" cy="0"/>
+        </a:xfrm>
+      </p:grpSpPr>
+      <p:sp>
+        <p:nvSpPr>
           <p:cNvPr id="59395" name="WordArt 3"/>
           <p:cNvSpPr>
             <a:spLocks noChangeArrowheads="1" noChangeShapeType="1" noTextEdit="1"/>
